--- a/dhruv-athlete-healthcheck/Dhruv_Athlete_Checkup_Gym_Partner_Deck.pptx
+++ b/dhruv-athlete-healthcheck/Dhruv_Athlete_Checkup_Gym_Partner_Deck.pptx
@@ -117,32 +117,32 @@
   <p:extLst>
     <p:ext uri="{521415D9-36F7-43E2-AB2F-B90AF26B5E84}">
       <p14:sectionLst xmlns:p14="http://schemas.microsoft.com/office/powerpoint/2010/main">
-        <p14:section name="Opening" id="{d8aa9af1-26a9-f5fc-a825-cf4094b72107}">
+        <p14:section name="Opening" id="{133ebb22-4312-c61e-b8d8-9a03915eaa49}">
           <p14:sldIdLst>
             <p14:sldId id="256"/>
           </p14:sldIdLst>
         </p14:section>
-        <p14:section name="Why" id="{17a02386-0501-f887-4f47-db4cea7071fa}">
+        <p14:section name="Why" id="{23847716-2a3c-a9e4-c84d-ad298c974d4d}">
           <p14:sldIdLst>
             <p14:sldId id="257"/>
             <p14:sldId id="258"/>
           </p14:sldIdLst>
         </p14:section>
-        <p14:section name="Offer" id="{7ed601a6-e208-ad63-23a5-f7c8ed0ff3a7}">
+        <p14:section name="Offer" id="{ca692a67-78d9-3378-a129-5f725f3de4a1}">
           <p14:sldIdLst>
             <p14:sldId id="259"/>
             <p14:sldId id="260"/>
             <p14:sldId id="261"/>
           </p14:sldIdLst>
         </p14:section>
-        <p14:section name="Partnership" id="{4e9d16ca-229d-2c03-10c9-815bad178e1f}">
+        <p14:section name="Partnership" id="{edb329a1-6ea3-3951-c5f2-037052e34041}">
           <p14:sldIdLst>
             <p14:sldId id="262"/>
             <p14:sldId id="263"/>
             <p14:sldId id="264"/>
           </p14:sldIdLst>
         </p14:section>
-        <p14:section name="Booking" id="{b0d1d989-78ef-e007-229d-ec9a5f9c687a}">
+        <p14:section name="Booking" id="{653b2570-0a0b-b016-afff-ea86cfc31ce2}">
           <p14:sldIdLst>
             <p14:sldId id="265"/>
             <p14:sldId id="266"/>

--- a/dhruv-athlete-healthcheck/Dhruv_Athlete_Checkup_Gym_Partner_Deck.pptx
+++ b/dhruv-athlete-healthcheck/Dhruv_Athlete_Checkup_Gym_Partner_Deck.pptx
@@ -117,32 +117,32 @@
   <p:extLst>
     <p:ext uri="{521415D9-36F7-43E2-AB2F-B90AF26B5E84}">
       <p14:sectionLst xmlns:p14="http://schemas.microsoft.com/office/powerpoint/2010/main">
-        <p14:section name="Opening" id="{133ebb22-4312-c61e-b8d8-9a03915eaa49}">
+        <p14:section name="Opening" id="{1b12a47b-46c3-e38c-10b5-e748fe3c0f3c}">
           <p14:sldIdLst>
             <p14:sldId id="256"/>
           </p14:sldIdLst>
         </p14:section>
-        <p14:section name="Why" id="{23847716-2a3c-a9e4-c84d-ad298c974d4d}">
+        <p14:section name="Why" id="{e1ab0044-9803-de13-a39d-427af252a6f9}">
           <p14:sldIdLst>
             <p14:sldId id="257"/>
             <p14:sldId id="258"/>
           </p14:sldIdLst>
         </p14:section>
-        <p14:section name="Offer" id="{ca692a67-78d9-3378-a129-5f725f3de4a1}">
+        <p14:section name="Offer" id="{5b5b1f8e-026e-6103-03af-c1bc95a19c43}">
           <p14:sldIdLst>
             <p14:sldId id="259"/>
             <p14:sldId id="260"/>
             <p14:sldId id="261"/>
           </p14:sldIdLst>
         </p14:section>
-        <p14:section name="Partnership" id="{edb329a1-6ea3-3951-c5f2-037052e34041}">
+        <p14:section name="Partnership" id="{2a20a4c0-4c8c-69b4-12d0-5941935bfa71}">
           <p14:sldIdLst>
             <p14:sldId id="262"/>
             <p14:sldId id="263"/>
             <p14:sldId id="264"/>
           </p14:sldIdLst>
         </p14:section>
-        <p14:section name="Booking" id="{653b2570-0a0b-b016-afff-ea86cfc31ce2}">
+        <p14:section name="Booking" id="{0335fb84-4014-4783-802b-b95939b2262e}">
           <p14:sldIdLst>
             <p14:sldId id="265"/>
             <p14:sldId id="266"/>
@@ -1602,16 +1602,40 @@
           </a:p>
         </p:txBody>
       </p:sp>
-      <p:sp>
-        <p:nvSpPr>
-          <p:cNvPr id="3" name="Text 0"/>
+      <p:pic>
+        <p:nvPicPr>
+          <p:cNvPr id="3" name="Image 0" descr="/tmp/claude-0/-home-user-BlisteringBlockchain/d9fb2d6e-0573-5890-9b54-a37c96abb606/scratchpad/art/logo_mark.png">    </p:cNvPr>
+          <p:cNvPicPr>
+            <a:picLocks noChangeAspect="1"/>
+          </p:cNvPicPr>
+          <p:nvPr/>
+        </p:nvPicPr>
+        <p:blipFill>
+          <a:blip r:embed="rId1"/>
+          <a:stretch>
+            <a:fillRect/>
+          </a:stretch>
+        </p:blipFill>
+        <p:spPr>
+          <a:xfrm>
+            <a:off x="457200" y="4709160"/>
+            <a:ext cx="246888" cy="306324"/>
+          </a:xfrm>
+          <a:prstGeom prst="rect">
+            <a:avLst/>
+          </a:prstGeom>
+        </p:spPr>
+      </p:pic>
+      <p:sp>
+        <p:nvSpPr>
+          <p:cNvPr id="4" name="Text 0"/>
           <p:cNvSpPr/>
           <p:nvPr/>
         </p:nvSpPr>
         <p:spPr>
           <a:xfrm>
-            <a:off x="457200" y="4773168"/>
-            <a:ext cx="5943600" cy="201168"/>
+            <a:off x="786384" y="4773168"/>
+            <a:ext cx="5669280" cy="201168"/>
           </a:xfrm>
           <a:prstGeom prst="rect">
             <a:avLst/>
@@ -2046,15 +2070,39 @@
           <a:chExt cx="0" cy="0"/>
         </a:xfrm>
       </p:grpSpPr>
-      <p:sp>
-        <p:nvSpPr>
-          <p:cNvPr id="2" name="Text 0"/>
-          <p:cNvSpPr txBox="1"/>
-          <p:nvPr/>
-        </p:nvSpPr>
-        <p:spPr>
-          <a:xfrm>
-            <a:off x="548640" y="457200"/>
+      <p:pic>
+        <p:nvPicPr>
+          <p:cNvPr id="2" name="Image 0" descr="Dhruv Diagnostics logo">    </p:cNvPr>
+          <p:cNvPicPr>
+            <a:picLocks noChangeAspect="1"/>
+          </p:cNvPicPr>
+          <p:nvPr/>
+        </p:nvPicPr>
+        <p:blipFill>
+          <a:blip r:embed="rId2"/>
+          <a:stretch>
+            <a:fillRect/>
+          </a:stretch>
+        </p:blipFill>
+        <p:spPr>
+          <a:xfrm>
+            <a:off x="548640" y="367881"/>
+            <a:ext cx="599923" cy="744322"/>
+          </a:xfrm>
+          <a:prstGeom prst="rect">
+            <a:avLst/>
+          </a:prstGeom>
+        </p:spPr>
+      </p:pic>
+      <p:sp>
+        <p:nvSpPr>
+          <p:cNvPr id="3" name="Text 0"/>
+          <p:cNvSpPr txBox="1"/>
+          <p:nvPr/>
+        </p:nvSpPr>
+        <p:spPr>
+          <a:xfrm>
+            <a:off x="1267435" y="457200"/>
             <a:ext cx="2743200" cy="731520"/>
           </a:xfrm>
           <a:prstGeom prst="rect">
@@ -2098,7 +2146,7 @@
       </p:sp>
       <p:sp>
         <p:nvSpPr>
-          <p:cNvPr id="3" name="Text 1"/>
+          <p:cNvPr id="4" name="Text 1"/>
           <p:cNvSpPr txBox="1"/>
           <p:nvPr/>
         </p:nvSpPr>
@@ -2134,7 +2182,7 @@
       </p:sp>
       <p:sp>
         <p:nvSpPr>
-          <p:cNvPr id="4" name="Text 2"/>
+          <p:cNvPr id="5" name="Text 2"/>
           <p:cNvSpPr txBox="1"/>
           <p:nvPr/>
         </p:nvSpPr>
@@ -2170,7 +2218,7 @@
       </p:sp>
       <p:sp>
         <p:nvSpPr>
-          <p:cNvPr id="5" name="Text 3"/>
+          <p:cNvPr id="6" name="Text 3"/>
           <p:cNvSpPr txBox="1"/>
           <p:nvPr/>
         </p:nvSpPr>
@@ -2833,15 +2881,39 @@
           <a:chExt cx="0" cy="0"/>
         </a:xfrm>
       </p:grpSpPr>
-      <p:sp>
-        <p:nvSpPr>
-          <p:cNvPr id="2" name="Text 0"/>
-          <p:cNvSpPr txBox="1"/>
-          <p:nvPr/>
-        </p:nvSpPr>
-        <p:spPr>
-          <a:xfrm>
-            <a:off x="548640" y="411480"/>
+      <p:pic>
+        <p:nvPicPr>
+          <p:cNvPr id="2" name="Image 0" descr="Dhruv Diagnostics logo">    </p:cNvPr>
+          <p:cNvPicPr>
+            <a:picLocks noChangeAspect="1"/>
+          </p:cNvPicPr>
+          <p:nvPr/>
+        </p:nvPicPr>
+        <p:blipFill>
+          <a:blip r:embed="rId2"/>
+          <a:stretch>
+            <a:fillRect/>
+          </a:stretch>
+        </p:blipFill>
+        <p:spPr>
+          <a:xfrm>
+            <a:off x="548640" y="338401"/>
+            <a:ext cx="490846" cy="608990"/>
+          </a:xfrm>
+          <a:prstGeom prst="rect">
+            <a:avLst/>
+          </a:prstGeom>
+        </p:spPr>
+      </p:pic>
+      <p:sp>
+        <p:nvSpPr>
+          <p:cNvPr id="3" name="Text 0"/>
+          <p:cNvSpPr txBox="1"/>
+          <p:nvPr/>
+        </p:nvSpPr>
+        <p:spPr>
+          <a:xfrm>
+            <a:off x="1158358" y="411480"/>
             <a:ext cx="2743200" cy="731520"/>
           </a:xfrm>
           <a:prstGeom prst="rect">
@@ -2885,7 +2957,7 @@
       </p:sp>
       <p:sp>
         <p:nvSpPr>
-          <p:cNvPr id="3" name="Text 1"/>
+          <p:cNvPr id="4" name="Text 1"/>
           <p:cNvSpPr txBox="1"/>
           <p:nvPr/>
         </p:nvSpPr>
@@ -2921,7 +2993,7 @@
       </p:sp>
       <p:sp>
         <p:nvSpPr>
-          <p:cNvPr id="4" name="Text 2"/>
+          <p:cNvPr id="5" name="Text 2"/>
           <p:cNvSpPr txBox="1"/>
           <p:nvPr/>
         </p:nvSpPr>
@@ -2968,7 +3040,7 @@
       </p:sp>
       <p:sp>
         <p:nvSpPr>
-          <p:cNvPr id="5" name="Text 3"/>
+          <p:cNvPr id="6" name="Text 3"/>
           <p:cNvSpPr txBox="1"/>
           <p:nvPr/>
         </p:nvSpPr>
@@ -3004,7 +3076,7 @@
       </p:sp>
       <p:sp>
         <p:nvSpPr>
-          <p:cNvPr id="6" name="Text 4"/>
+          <p:cNvPr id="7" name="Text 4"/>
           <p:cNvSpPr txBox="1"/>
           <p:nvPr/>
         </p:nvSpPr>
@@ -3051,7 +3123,7 @@
       </p:sp>
       <p:sp>
         <p:nvSpPr>
-          <p:cNvPr id="7" name="Text 5"/>
+          <p:cNvPr id="8" name="Text 5"/>
           <p:cNvSpPr txBox="1"/>
           <p:nvPr/>
         </p:nvSpPr>
@@ -3087,7 +3159,7 @@
       </p:sp>
       <p:sp>
         <p:nvSpPr>
-          <p:cNvPr id="8" name="Text 6"/>
+          <p:cNvPr id="9" name="Text 6"/>
           <p:cNvSpPr txBox="1"/>
           <p:nvPr/>
         </p:nvSpPr>
@@ -3123,7 +3195,7 @@
       </p:sp>
       <p:sp>
         <p:nvSpPr>
-          <p:cNvPr id="9" name="Shape 7"/>
+          <p:cNvPr id="10" name="Shape 7"/>
           <p:cNvSpPr/>
           <p:nvPr/>
         </p:nvSpPr>
@@ -3148,14 +3220,14 @@
       </p:sp>
       <p:pic>
         <p:nvPicPr>
-          <p:cNvPr id="10" name="Image 0" descr="Website QR code">    </p:cNvPr>
+          <p:cNvPr id="11" name="Image 1" descr="Website QR code">    </p:cNvPr>
           <p:cNvPicPr>
             <a:picLocks noChangeAspect="1"/>
           </p:cNvPicPr>
           <p:nvPr/>
         </p:nvPicPr>
         <p:blipFill>
-          <a:blip r:embed="rId2"/>
+          <a:blip r:embed="rId3"/>
           <a:stretch>
             <a:fillRect/>
           </a:stretch>
@@ -3172,7 +3244,7 @@
       </p:pic>
       <p:sp>
         <p:nvSpPr>
-          <p:cNvPr id="11" name="Text 8"/>
+          <p:cNvPr id="12" name="Text 8"/>
           <p:cNvSpPr txBox="1"/>
           <p:nvPr/>
         </p:nvSpPr>
@@ -3208,7 +3280,7 @@
       </p:sp>
       <p:sp>
         <p:nvSpPr>
-          <p:cNvPr id="12" name="Shape 9"/>
+          <p:cNvPr id="13" name="Shape 9"/>
           <p:cNvSpPr/>
           <p:nvPr/>
         </p:nvSpPr>
@@ -3233,14 +3305,14 @@
       </p:sp>
       <p:pic>
         <p:nvPicPr>
-          <p:cNvPr id="13" name="Image 1" descr="Laxmi Nagar map QR code">    </p:cNvPr>
+          <p:cNvPr id="14" name="Image 2" descr="Laxmi Nagar map QR code">    </p:cNvPr>
           <p:cNvPicPr>
             <a:picLocks noChangeAspect="1"/>
           </p:cNvPicPr>
           <p:nvPr/>
         </p:nvPicPr>
         <p:blipFill>
-          <a:blip r:embed="rId3"/>
+          <a:blip r:embed="rId4"/>
           <a:stretch>
             <a:fillRect/>
           </a:stretch>
@@ -3257,7 +3329,7 @@
       </p:pic>
       <p:sp>
         <p:nvSpPr>
-          <p:cNvPr id="14" name="Text 10"/>
+          <p:cNvPr id="15" name="Text 10"/>
           <p:cNvSpPr txBox="1"/>
           <p:nvPr/>
         </p:nvSpPr>
@@ -3293,7 +3365,7 @@
       </p:sp>
       <p:sp>
         <p:nvSpPr>
-          <p:cNvPr id="15" name="Shape 11"/>
+          <p:cNvPr id="16" name="Shape 11"/>
           <p:cNvSpPr/>
           <p:nvPr/>
         </p:nvSpPr>
@@ -3318,14 +3390,14 @@
       </p:sp>
       <p:pic>
         <p:nvPicPr>
-          <p:cNvPr id="16" name="Image 2" descr="Ramdaspeth map QR code">    </p:cNvPr>
+          <p:cNvPr id="17" name="Image 3" descr="Ramdaspeth map QR code">    </p:cNvPr>
           <p:cNvPicPr>
             <a:picLocks noChangeAspect="1"/>
           </p:cNvPicPr>
           <p:nvPr/>
         </p:nvPicPr>
         <p:blipFill>
-          <a:blip r:embed="rId4"/>
+          <a:blip r:embed="rId5"/>
           <a:stretch>
             <a:fillRect/>
           </a:stretch>
@@ -3342,7 +3414,7 @@
       </p:pic>
       <p:sp>
         <p:nvSpPr>
-          <p:cNvPr id="17" name="Text 12"/>
+          <p:cNvPr id="18" name="Text 12"/>
           <p:cNvSpPr txBox="1"/>
           <p:nvPr/>
         </p:nvSpPr>
@@ -3943,7 +4015,7 @@
       </p:sp>
       <p:pic>
         <p:nvPicPr>
-          <p:cNvPr id="3" name="Image 0" descr="Illustration of a sprinter">    </p:cNvPr>
+          <p:cNvPr id="3" name="Image 0" descr="DNA double helix illustration">    </p:cNvPr>
           <p:cNvPicPr>
             <a:picLocks noChangeAspect="1"/>
           </p:cNvPicPr>
@@ -6978,7 +7050,7 @@
       </p:sp>
       <p:pic>
         <p:nvPicPr>
-          <p:cNvPr id="3" name="Image 0" descr="Illustration of a sprinter">    </p:cNvPr>
+          <p:cNvPr id="3" name="Image 0" descr="DNA double helix illustration">    </p:cNvPr>
           <p:cNvPicPr>
             <a:picLocks noChangeAspect="1"/>
           </p:cNvPicPr>

--- a/dhruv-athlete-healthcheck/Dhruv_Athlete_Checkup_Gym_Partner_Deck.pptx
+++ b/dhruv-athlete-healthcheck/Dhruv_Athlete_Checkup_Gym_Partner_Deck.pptx
@@ -117,32 +117,32 @@
   <p:extLst>
     <p:ext uri="{521415D9-36F7-43E2-AB2F-B90AF26B5E84}">
       <p14:sectionLst xmlns:p14="http://schemas.microsoft.com/office/powerpoint/2010/main">
-        <p14:section name="Opening" id="{1b12a47b-46c3-e38c-10b5-e748fe3c0f3c}">
+        <p14:section name="Opening" id="{185be187-7ebd-66ec-14f5-edaf44842fde}">
           <p14:sldIdLst>
             <p14:sldId id="256"/>
           </p14:sldIdLst>
         </p14:section>
-        <p14:section name="Why" id="{e1ab0044-9803-de13-a39d-427af252a6f9}">
+        <p14:section name="Why" id="{aafa37d6-56c5-63f1-154d-1b532d402c54}">
           <p14:sldIdLst>
             <p14:sldId id="257"/>
             <p14:sldId id="258"/>
           </p14:sldIdLst>
         </p14:section>
-        <p14:section name="Offer" id="{5b5b1f8e-026e-6103-03af-c1bc95a19c43}">
+        <p14:section name="Offer" id="{51d32974-f81a-8aa9-9cc3-6ca792ede22c}">
           <p14:sldIdLst>
             <p14:sldId id="259"/>
             <p14:sldId id="260"/>
             <p14:sldId id="261"/>
           </p14:sldIdLst>
         </p14:section>
-        <p14:section name="Partnership" id="{2a20a4c0-4c8c-69b4-12d0-5941935bfa71}">
+        <p14:section name="Partnership" id="{1b429cf3-90e6-cac9-51d4-5ded612e5edd}">
           <p14:sldIdLst>
             <p14:sldId id="262"/>
             <p14:sldId id="263"/>
             <p14:sldId id="264"/>
           </p14:sldIdLst>
         </p14:section>
-        <p14:section name="Booking" id="{0335fb84-4014-4783-802b-b95939b2262e}">
+        <p14:section name="Booking" id="{6077887d-6666-a5eb-2ff5-33c9bdfbd575}">
           <p14:sldIdLst>
             <p14:sldId id="265"/>
             <p14:sldId id="266"/>
@@ -1168,7 +1168,7 @@
           <a:p>
             <a:r>
               <a:rPr lang="en-US" dirty="0"/>
-              <a:t>Fill in partner prices before the meeting. A urine drugs-of-abuse screen can be added to any plan.</a:t>
+              <a:t>Prices are proposed launch prices set from 2026 market rates for each test in Nagpur and national chains; the struck-through figure is the sum of the same tests bought one by one. Confirm with Dhruv management before external use.</a:t>
             </a:r>
             <a:endParaRPr lang="en-US" dirty="0"/>
           </a:p>
@@ -5549,7 +5549,7 @@
         <p:spPr>
           <a:xfrm>
             <a:off x="457200" y="1051560"/>
-            <a:ext cx="2606040" cy="3520440"/>
+            <a:ext cx="2606040" cy="3310128"/>
           </a:xfrm>
           <a:prstGeom prst="rect">
             <a:avLst/>
@@ -5573,31 +5573,31 @@
         </p:nvSpPr>
         <p:spPr>
           <a:xfrm>
-            <a:off x="658368" y="1207008"/>
-            <a:ext cx="2240280" cy="411480"/>
-          </a:xfrm>
-          <a:prstGeom prst="rect">
-            <a:avLst/>
-          </a:prstGeom>
-          <a:noFill/>
-          <a:ln/>
-        </p:spPr>
-        <p:txBody>
-          <a:bodyPr wrap="square" lIns="0" tIns="0" rIns="0" bIns="0" rtlCol="0" anchor="t"/>
-          <a:lstStyle/>
-          <a:p>
-            <a:pPr indent="0" marL="0">
-              <a:buNone/>
-            </a:pPr>
-            <a:r>
-              <a:rPr lang="en-US" sz="2200" b="1" dirty="0">
+            <a:off x="658368" y="1188720"/>
+            <a:ext cx="2240280" cy="384048"/>
+          </a:xfrm>
+          <a:prstGeom prst="rect">
+            <a:avLst/>
+          </a:prstGeom>
+          <a:noFill/>
+          <a:ln/>
+        </p:spPr>
+        <p:txBody>
+          <a:bodyPr wrap="square" lIns="0" tIns="0" rIns="0" bIns="0" rtlCol="0" anchor="t"/>
+          <a:lstStyle/>
+          <a:p>
+            <a:pPr indent="0" marL="0">
+              <a:buNone/>
+            </a:pPr>
+            <a:r>
+              <a:rPr lang="en-US" sz="2100" b="1" dirty="0">
                 <a:solidFill>
                   <a:srgbClr val="1B2A4A"/>
                 </a:solidFill>
               </a:rPr>
               <a:t>Base</a:t>
             </a:r>
-            <a:endParaRPr lang="en-US" sz="2200" dirty="0"/>
+            <a:endParaRPr lang="en-US" sz="2100" dirty="0"/>
           </a:p>
         </p:txBody>
       </p:sp>
@@ -5609,31 +5609,31 @@
         </p:nvSpPr>
         <p:spPr>
           <a:xfrm>
-            <a:off x="658368" y="1664208"/>
-            <a:ext cx="2240280" cy="685800"/>
-          </a:xfrm>
-          <a:prstGeom prst="rect">
-            <a:avLst/>
-          </a:prstGeom>
-          <a:noFill/>
-          <a:ln/>
-        </p:spPr>
-        <p:txBody>
-          <a:bodyPr wrap="square" lIns="0" tIns="0" rIns="0" bIns="0" rtlCol="0" anchor="t"/>
-          <a:lstStyle/>
-          <a:p>
-            <a:pPr indent="0" marL="0">
-              <a:buNone/>
-            </a:pPr>
-            <a:r>
-              <a:rPr lang="en-US" sz="1200" i="1" dirty="0">
+            <a:off x="658368" y="1591056"/>
+            <a:ext cx="2240280" cy="566928"/>
+          </a:xfrm>
+          <a:prstGeom prst="rect">
+            <a:avLst/>
+          </a:prstGeom>
+          <a:noFill/>
+          <a:ln/>
+        </p:spPr>
+        <p:txBody>
+          <a:bodyPr wrap="square" lIns="0" tIns="0" rIns="0" bIns="0" rtlCol="0" anchor="t"/>
+          <a:lstStyle/>
+          <a:p>
+            <a:pPr indent="0" marL="0">
+              <a:buNone/>
+            </a:pPr>
+            <a:r>
+              <a:rPr lang="en-US" sz="1100" i="1" dirty="0">
                 <a:solidFill>
                   <a:srgbClr val="475569"/>
                 </a:solidFill>
               </a:rPr>
               <a:t>Members starting out or under 35</a:t>
             </a:r>
-            <a:endParaRPr lang="en-US" sz="1200" dirty="0"/>
+            <a:endParaRPr lang="en-US" sz="1100" dirty="0"/>
           </a:p>
         </p:txBody>
       </p:sp>
@@ -5645,8 +5645,8 @@
         </p:nvSpPr>
         <p:spPr>
           <a:xfrm>
-            <a:off x="658368" y="2377440"/>
-            <a:ext cx="2240280" cy="1600200"/>
+            <a:off x="658368" y="2194560"/>
+            <a:ext cx="2240280" cy="1234440"/>
           </a:xfrm>
           <a:prstGeom prst="rect">
             <a:avLst/>
@@ -5660,56 +5660,56 @@
           <a:p>
             <a:pPr marL="342900" indent="-342900">
               <a:spcAft>
-                <a:spcPts val="400"/>
+                <a:spcPts val="300"/>
               </a:spcAft>
               <a:buSzPct val="100000"/>
               <a:buChar char="•"/>
             </a:pPr>
             <a:r>
-              <a:rPr lang="en-US" sz="1300" dirty="0">
+              <a:rPr lang="en-US" sz="1200" dirty="0">
                 <a:solidFill>
                   <a:srgbClr val="1B2A4A"/>
                 </a:solidFill>
               </a:rPr>
               <a:t>Full blood panel and ECG</a:t>
             </a:r>
-            <a:endParaRPr lang="en-US" sz="1300" dirty="0"/>
+            <a:endParaRPr lang="en-US" sz="1200" dirty="0"/>
           </a:p>
           <a:p>
             <a:pPr marL="342900" indent="-342900">
               <a:spcAft>
-                <a:spcPts val="400"/>
+                <a:spcPts val="300"/>
               </a:spcAft>
               <a:buSzPct val="100000"/>
               <a:buChar char="•"/>
             </a:pPr>
             <a:r>
-              <a:rPr lang="en-US" sz="1300" dirty="0">
+              <a:rPr lang="en-US" sz="1200" dirty="0">
                 <a:solidFill>
                   <a:srgbClr val="1B2A4A"/>
                 </a:solidFill>
               </a:rPr>
               <a:t>CK muscle marker</a:t>
             </a:r>
-            <a:endParaRPr lang="en-US" sz="1300" dirty="0"/>
+            <a:endParaRPr lang="en-US" sz="1200" dirty="0"/>
           </a:p>
           <a:p>
             <a:pPr marL="342900" indent="-342900">
               <a:spcAft>
-                <a:spcPts val="400"/>
+                <a:spcPts val="300"/>
               </a:spcAft>
               <a:buSzPct val="100000"/>
               <a:buChar char="•"/>
             </a:pPr>
             <a:r>
-              <a:rPr lang="en-US" sz="1300" dirty="0">
+              <a:rPr lang="en-US" sz="1200" dirty="0">
                 <a:solidFill>
                   <a:srgbClr val="1B2A4A"/>
                 </a:solidFill>
               </a:rPr>
               <a:t>Physician review</a:t>
             </a:r>
-            <a:endParaRPr lang="en-US" sz="1300" dirty="0"/>
+            <a:endParaRPr lang="en-US" sz="1200" dirty="0"/>
           </a:p>
         </p:txBody>
       </p:sp>
@@ -5721,44 +5721,127 @@
         </p:nvSpPr>
         <p:spPr>
           <a:xfrm>
-            <a:off x="658368" y="4160520"/>
-            <a:ext cx="2240280" cy="274320"/>
-          </a:xfrm>
-          <a:prstGeom prst="rect">
-            <a:avLst/>
-          </a:prstGeom>
-          <a:noFill/>
-          <a:ln/>
-        </p:spPr>
-        <p:txBody>
-          <a:bodyPr wrap="square" lIns="0" tIns="0" rIns="0" bIns="0" rtlCol="0" anchor="t"/>
-          <a:lstStyle/>
-          <a:p>
-            <a:pPr indent="0" marL="0">
-              <a:buNone/>
-            </a:pPr>
-            <a:r>
-              <a:rPr lang="en-US" sz="1200" b="1" dirty="0">
+            <a:off x="658368" y="3291840"/>
+            <a:ext cx="2240280" cy="457200"/>
+          </a:xfrm>
+          <a:prstGeom prst="rect">
+            <a:avLst/>
+          </a:prstGeom>
+          <a:noFill/>
+          <a:ln/>
+        </p:spPr>
+        <p:txBody>
+          <a:bodyPr wrap="square" lIns="0" tIns="0" rIns="0" bIns="0" rtlCol="0" anchor="t"/>
+          <a:lstStyle/>
+          <a:p>
+            <a:pPr indent="0" marL="0">
+              <a:buNone/>
+            </a:pPr>
+            <a:r>
+              <a:rPr lang="en-US" sz="2800" b="1" dirty="0">
                 <a:solidFill>
                   <a:srgbClr val="2563EB"/>
                 </a:solidFill>
               </a:rPr>
-              <a:t>Partner price on request</a:t>
-            </a:r>
-            <a:endParaRPr lang="en-US" sz="1200" dirty="0"/>
-          </a:p>
-        </p:txBody>
-      </p:sp>
-      <p:sp>
-        <p:nvSpPr>
-          <p:cNvPr id="8" name="Shape 6"/>
+              <a:t>₹2,999</a:t>
+            </a:r>
+            <a:endParaRPr lang="en-US" sz="2800" dirty="0"/>
+          </a:p>
+        </p:txBody>
+      </p:sp>
+      <p:sp>
+        <p:nvSpPr>
+          <p:cNvPr id="8" name="Text 6"/>
+          <p:cNvSpPr txBox="1"/>
+          <p:nvPr/>
+        </p:nvSpPr>
+        <p:spPr>
+          <a:xfrm>
+            <a:off x="658368" y="3767328"/>
+            <a:ext cx="2240280" cy="228600"/>
+          </a:xfrm>
+          <a:prstGeom prst="rect">
+            <a:avLst/>
+          </a:prstGeom>
+          <a:noFill/>
+          <a:ln/>
+        </p:spPr>
+        <p:txBody>
+          <a:bodyPr wrap="square" lIns="0" tIns="0" rIns="0" bIns="0" rtlCol="0" anchor="t"/>
+          <a:lstStyle/>
+          <a:p>
+            <a:pPr indent="0" marL="0">
+              <a:buNone/>
+            </a:pPr>
+            <a:r>
+              <a:rPr lang="en-US" sz="1100" b="1" dirty="0">
+                <a:solidFill>
+                  <a:srgbClr val="1B2A4A"/>
+                </a:solidFill>
+              </a:rPr>
+              <a:t>Gym-partner members ₹2,699</a:t>
+            </a:r>
+            <a:endParaRPr lang="en-US" sz="1100" dirty="0"/>
+          </a:p>
+        </p:txBody>
+      </p:sp>
+      <p:sp>
+        <p:nvSpPr>
+          <p:cNvPr id="9" name="Text 7"/>
+          <p:cNvSpPr txBox="1"/>
+          <p:nvPr/>
+        </p:nvSpPr>
+        <p:spPr>
+          <a:xfrm>
+            <a:off x="658368" y="4023360"/>
+            <a:ext cx="2240280" cy="228600"/>
+          </a:xfrm>
+          <a:prstGeom prst="rect">
+            <a:avLst/>
+          </a:prstGeom>
+          <a:noFill/>
+          <a:ln/>
+        </p:spPr>
+        <p:txBody>
+          <a:bodyPr wrap="square" lIns="0" tIns="0" rIns="0" bIns="0" rtlCol="0" anchor="t"/>
+          <a:lstStyle/>
+          <a:p>
+            <a:pPr indent="0" marL="0">
+              <a:buNone/>
+            </a:pPr>
+            <a:r>
+              <a:rPr lang="en-US" sz="1000" dirty="0">
+                <a:solidFill>
+                  <a:srgbClr val="475569"/>
+                </a:solidFill>
+              </a:rPr>
+              <a:t>Tests bought separately </a:t>
+            </a:r>
+            <a:pPr indent="0" marL="0">
+              <a:buNone/>
+            </a:pPr>
+            <a:r>
+              <a:rPr lang="en-US" sz="1000" strike="sngStrike" dirty="0">
+                <a:solidFill>
+                  <a:srgbClr val="475569"/>
+                </a:solidFill>
+              </a:rPr>
+              <a:t>₹8,800</a:t>
+            </a:r>
+            <a:endParaRPr lang="en-US" sz="1000" dirty="0"/>
+          </a:p>
+        </p:txBody>
+      </p:sp>
+      <p:sp>
+        <p:nvSpPr>
+          <p:cNvPr id="10" name="Shape 8"/>
           <p:cNvSpPr/>
           <p:nvPr/>
         </p:nvSpPr>
         <p:spPr>
           <a:xfrm>
             <a:off x="3246120" y="1051560"/>
-            <a:ext cx="2606040" cy="3520440"/>
+            <a:ext cx="2606040" cy="3310128"/>
           </a:xfrm>
           <a:prstGeom prst="rect">
             <a:avLst/>
@@ -5776,86 +5859,86 @@
       </p:sp>
       <p:sp>
         <p:nvSpPr>
-          <p:cNvPr id="9" name="Text 7"/>
-          <p:cNvSpPr txBox="1"/>
-          <p:nvPr/>
-        </p:nvSpPr>
-        <p:spPr>
-          <a:xfrm>
-            <a:off x="3447288" y="1207008"/>
-            <a:ext cx="2240280" cy="411480"/>
-          </a:xfrm>
-          <a:prstGeom prst="rect">
-            <a:avLst/>
-          </a:prstGeom>
-          <a:noFill/>
-          <a:ln/>
-        </p:spPr>
-        <p:txBody>
-          <a:bodyPr wrap="square" lIns="0" tIns="0" rIns="0" bIns="0" rtlCol="0" anchor="t"/>
-          <a:lstStyle/>
-          <a:p>
-            <a:pPr indent="0" marL="0">
-              <a:buNone/>
-            </a:pPr>
-            <a:r>
-              <a:rPr lang="en-US" sz="2200" b="1" dirty="0">
+          <p:cNvPr id="11" name="Text 9"/>
+          <p:cNvSpPr txBox="1"/>
+          <p:nvPr/>
+        </p:nvSpPr>
+        <p:spPr>
+          <a:xfrm>
+            <a:off x="3447288" y="1188720"/>
+            <a:ext cx="2240280" cy="384048"/>
+          </a:xfrm>
+          <a:prstGeom prst="rect">
+            <a:avLst/>
+          </a:prstGeom>
+          <a:noFill/>
+          <a:ln/>
+        </p:spPr>
+        <p:txBody>
+          <a:bodyPr wrap="square" lIns="0" tIns="0" rIns="0" bIns="0" rtlCol="0" anchor="t"/>
+          <a:lstStyle/>
+          <a:p>
+            <a:pPr indent="0" marL="0">
+              <a:buNone/>
+            </a:pPr>
+            <a:r>
+              <a:rPr lang="en-US" sz="2100" b="1" dirty="0">
                 <a:solidFill>
                   <a:srgbClr val="FFFFFF"/>
                 </a:solidFill>
               </a:rPr>
               <a:t>Performance</a:t>
             </a:r>
-            <a:endParaRPr lang="en-US" sz="2200" dirty="0"/>
-          </a:p>
-        </p:txBody>
-      </p:sp>
-      <p:sp>
-        <p:nvSpPr>
-          <p:cNvPr id="10" name="Text 8"/>
-          <p:cNvSpPr txBox="1"/>
-          <p:nvPr/>
-        </p:nvSpPr>
-        <p:spPr>
-          <a:xfrm>
-            <a:off x="3447288" y="1664208"/>
-            <a:ext cx="2240280" cy="685800"/>
-          </a:xfrm>
-          <a:prstGeom prst="rect">
-            <a:avLst/>
-          </a:prstGeom>
-          <a:noFill/>
-          <a:ln/>
-        </p:spPr>
-        <p:txBody>
-          <a:bodyPr wrap="square" lIns="0" tIns="0" rIns="0" bIns="0" rtlCol="0" anchor="t"/>
-          <a:lstStyle/>
-          <a:p>
-            <a:pPr indent="0" marL="0">
-              <a:buNone/>
-            </a:pPr>
-            <a:r>
-              <a:rPr lang="en-US" sz="1200" i="1" dirty="0">
+            <a:endParaRPr lang="en-US" sz="2100" dirty="0"/>
+          </a:p>
+        </p:txBody>
+      </p:sp>
+      <p:sp>
+        <p:nvSpPr>
+          <p:cNvPr id="12" name="Text 10"/>
+          <p:cNvSpPr txBox="1"/>
+          <p:nvPr/>
+        </p:nvSpPr>
+        <p:spPr>
+          <a:xfrm>
+            <a:off x="3447288" y="1591056"/>
+            <a:ext cx="2240280" cy="566928"/>
+          </a:xfrm>
+          <a:prstGeom prst="rect">
+            <a:avLst/>
+          </a:prstGeom>
+          <a:noFill/>
+          <a:ln/>
+        </p:spPr>
+        <p:txBody>
+          <a:bodyPr wrap="square" lIns="0" tIns="0" rIns="0" bIns="0" rtlCol="0" anchor="t"/>
+          <a:lstStyle/>
+          <a:p>
+            <a:pPr indent="0" marL="0">
+              <a:buNone/>
+            </a:pPr>
+            <a:r>
+              <a:rPr lang="en-US" sz="1100" i="1" dirty="0">
                 <a:solidFill>
                   <a:srgbClr val="E1EBFF"/>
                 </a:solidFill>
               </a:rPr>
               <a:t>Regular lifters, runners, members on a cut or bulk</a:t>
             </a:r>
-            <a:endParaRPr lang="en-US" sz="1200" dirty="0"/>
-          </a:p>
-        </p:txBody>
-      </p:sp>
-      <p:sp>
-        <p:nvSpPr>
-          <p:cNvPr id="11" name="Text 9"/>
-          <p:cNvSpPr txBox="1"/>
-          <p:nvPr/>
-        </p:nvSpPr>
-        <p:spPr>
-          <a:xfrm>
-            <a:off x="3447288" y="2377440"/>
-            <a:ext cx="2240280" cy="1600200"/>
+            <a:endParaRPr lang="en-US" sz="1100" dirty="0"/>
+          </a:p>
+        </p:txBody>
+      </p:sp>
+      <p:sp>
+        <p:nvSpPr>
+          <p:cNvPr id="13" name="Text 11"/>
+          <p:cNvSpPr txBox="1"/>
+          <p:nvPr/>
+        </p:nvSpPr>
+        <p:spPr>
+          <a:xfrm>
+            <a:off x="3447288" y="2194560"/>
+            <a:ext cx="2240280" cy="1234440"/>
           </a:xfrm>
           <a:prstGeom prst="rect">
             <a:avLst/>
@@ -5869,123 +5952,206 @@
           <a:p>
             <a:pPr marL="342900" indent="-342900">
               <a:spcAft>
-                <a:spcPts val="400"/>
+                <a:spcPts val="300"/>
               </a:spcAft>
               <a:buSzPct val="100000"/>
               <a:buChar char="•"/>
             </a:pPr>
             <a:r>
-              <a:rPr lang="en-US" sz="1300" dirty="0">
+              <a:rPr lang="en-US" sz="1200" dirty="0">
                 <a:solidFill>
                   <a:srgbClr val="FFFFFF"/>
                 </a:solidFill>
               </a:rPr>
-              <a:t>Everything in Base</a:t>
-            </a:r>
-            <a:endParaRPr lang="en-US" sz="1300" dirty="0"/>
+              <a:t>All of Base</a:t>
+            </a:r>
+            <a:endParaRPr lang="en-US" sz="1200" dirty="0"/>
           </a:p>
           <a:p>
             <a:pPr marL="342900" indent="-342900">
               <a:spcAft>
-                <a:spcPts val="400"/>
+                <a:spcPts val="300"/>
               </a:spcAft>
               <a:buSzPct val="100000"/>
               <a:buChar char="•"/>
             </a:pPr>
             <a:r>
-              <a:rPr lang="en-US" sz="1300" dirty="0">
+              <a:rPr lang="en-US" sz="1200" dirty="0">
                 <a:solidFill>
                   <a:srgbClr val="FFFFFF"/>
                 </a:solidFill>
               </a:rPr>
               <a:t>Apo B, Lp(a), NT-proBNP</a:t>
             </a:r>
-            <a:endParaRPr lang="en-US" sz="1300" dirty="0"/>
+            <a:endParaRPr lang="en-US" sz="1200" dirty="0"/>
           </a:p>
           <a:p>
             <a:pPr marL="342900" indent="-342900">
               <a:spcAft>
-                <a:spcPts val="400"/>
+                <a:spcPts val="300"/>
               </a:spcAft>
               <a:buSzPct val="100000"/>
               <a:buChar char="•"/>
             </a:pPr>
             <a:r>
-              <a:rPr lang="en-US" sz="1300" dirty="0">
+              <a:rPr lang="en-US" sz="1200" dirty="0">
                 <a:solidFill>
                   <a:srgbClr val="FFFFFF"/>
                 </a:solidFill>
               </a:rPr>
-              <a:t>Hormone and full muscle panel</a:t>
-            </a:r>
-            <a:endParaRPr lang="en-US" sz="1300" dirty="0"/>
+              <a:t>Hormone and muscle panel</a:t>
+            </a:r>
+            <a:endParaRPr lang="en-US" sz="1200" dirty="0"/>
           </a:p>
           <a:p>
             <a:pPr marL="342900" indent="-342900">
               <a:spcAft>
-                <a:spcPts val="400"/>
+                <a:spcPts val="300"/>
               </a:spcAft>
               <a:buSzPct val="100000"/>
               <a:buChar char="•"/>
             </a:pPr>
             <a:r>
-              <a:rPr lang="en-US" sz="1300" dirty="0">
+              <a:rPr lang="en-US" sz="1200" dirty="0">
                 <a:solidFill>
                   <a:srgbClr val="FFFFFF"/>
                 </a:solidFill>
               </a:rPr>
-              <a:t>One ultrasound region</a:t>
-            </a:r>
-            <a:endParaRPr lang="en-US" sz="1300" dirty="0"/>
-          </a:p>
-        </p:txBody>
-      </p:sp>
-      <p:sp>
-        <p:nvSpPr>
-          <p:cNvPr id="12" name="Text 10"/>
-          <p:cNvSpPr txBox="1"/>
-          <p:nvPr/>
-        </p:nvSpPr>
-        <p:spPr>
-          <a:xfrm>
-            <a:off x="3447288" y="4160520"/>
-            <a:ext cx="2240280" cy="274320"/>
-          </a:xfrm>
-          <a:prstGeom prst="rect">
-            <a:avLst/>
-          </a:prstGeom>
-          <a:noFill/>
-          <a:ln/>
-        </p:spPr>
-        <p:txBody>
-          <a:bodyPr wrap="square" lIns="0" tIns="0" rIns="0" bIns="0" rtlCol="0" anchor="t"/>
-          <a:lstStyle/>
-          <a:p>
-            <a:pPr indent="0" marL="0">
-              <a:buNone/>
-            </a:pPr>
-            <a:r>
-              <a:rPr lang="en-US" sz="1200" b="1" dirty="0">
+              <a:t>1 ultrasound region</a:t>
+            </a:r>
+            <a:endParaRPr lang="en-US" sz="1200" dirty="0"/>
+          </a:p>
+        </p:txBody>
+      </p:sp>
+      <p:sp>
+        <p:nvSpPr>
+          <p:cNvPr id="14" name="Text 12"/>
+          <p:cNvSpPr txBox="1"/>
+          <p:nvPr/>
+        </p:nvSpPr>
+        <p:spPr>
+          <a:xfrm>
+            <a:off x="3447288" y="3291840"/>
+            <a:ext cx="2240280" cy="457200"/>
+          </a:xfrm>
+          <a:prstGeom prst="rect">
+            <a:avLst/>
+          </a:prstGeom>
+          <a:noFill/>
+          <a:ln/>
+        </p:spPr>
+        <p:txBody>
+          <a:bodyPr wrap="square" lIns="0" tIns="0" rIns="0" bIns="0" rtlCol="0" anchor="t"/>
+          <a:lstStyle/>
+          <a:p>
+            <a:pPr indent="0" marL="0">
+              <a:buNone/>
+            </a:pPr>
+            <a:r>
+              <a:rPr lang="en-US" sz="2800" b="1" dirty="0">
                 <a:solidFill>
                   <a:srgbClr val="FFFFFF"/>
                 </a:solidFill>
               </a:rPr>
-              <a:t>Partner price on request</a:t>
-            </a:r>
-            <a:endParaRPr lang="en-US" sz="1200" dirty="0"/>
-          </a:p>
-        </p:txBody>
-      </p:sp>
-      <p:sp>
-        <p:nvSpPr>
-          <p:cNvPr id="13" name="Shape 11"/>
+              <a:t>₹8,999</a:t>
+            </a:r>
+            <a:endParaRPr lang="en-US" sz="2800" dirty="0"/>
+          </a:p>
+        </p:txBody>
+      </p:sp>
+      <p:sp>
+        <p:nvSpPr>
+          <p:cNvPr id="15" name="Text 13"/>
+          <p:cNvSpPr txBox="1"/>
+          <p:nvPr/>
+        </p:nvSpPr>
+        <p:spPr>
+          <a:xfrm>
+            <a:off x="3447288" y="3767328"/>
+            <a:ext cx="2240280" cy="228600"/>
+          </a:xfrm>
+          <a:prstGeom prst="rect">
+            <a:avLst/>
+          </a:prstGeom>
+          <a:noFill/>
+          <a:ln/>
+        </p:spPr>
+        <p:txBody>
+          <a:bodyPr wrap="square" lIns="0" tIns="0" rIns="0" bIns="0" rtlCol="0" anchor="t"/>
+          <a:lstStyle/>
+          <a:p>
+            <a:pPr indent="0" marL="0">
+              <a:buNone/>
+            </a:pPr>
+            <a:r>
+              <a:rPr lang="en-US" sz="1100" b="1" dirty="0">
+                <a:solidFill>
+                  <a:srgbClr val="FFFFFF"/>
+                </a:solidFill>
+              </a:rPr>
+              <a:t>Gym-partner members ₹8,099</a:t>
+            </a:r>
+            <a:endParaRPr lang="en-US" sz="1100" dirty="0"/>
+          </a:p>
+        </p:txBody>
+      </p:sp>
+      <p:sp>
+        <p:nvSpPr>
+          <p:cNvPr id="16" name="Text 14"/>
+          <p:cNvSpPr txBox="1"/>
+          <p:nvPr/>
+        </p:nvSpPr>
+        <p:spPr>
+          <a:xfrm>
+            <a:off x="3447288" y="4023360"/>
+            <a:ext cx="2240280" cy="228600"/>
+          </a:xfrm>
+          <a:prstGeom prst="rect">
+            <a:avLst/>
+          </a:prstGeom>
+          <a:noFill/>
+          <a:ln/>
+        </p:spPr>
+        <p:txBody>
+          <a:bodyPr wrap="square" lIns="0" tIns="0" rIns="0" bIns="0" rtlCol="0" anchor="t"/>
+          <a:lstStyle/>
+          <a:p>
+            <a:pPr indent="0" marL="0">
+              <a:buNone/>
+            </a:pPr>
+            <a:r>
+              <a:rPr lang="en-US" sz="1000" dirty="0">
+                <a:solidFill>
+                  <a:srgbClr val="E1EBFF"/>
+                </a:solidFill>
+              </a:rPr>
+              <a:t>Tests bought separately </a:t>
+            </a:r>
+            <a:pPr indent="0" marL="0">
+              <a:buNone/>
+            </a:pPr>
+            <a:r>
+              <a:rPr lang="en-US" sz="1000" strike="sngStrike" dirty="0">
+                <a:solidFill>
+                  <a:srgbClr val="E1EBFF"/>
+                </a:solidFill>
+              </a:rPr>
+              <a:t>₹29,000</a:t>
+            </a:r>
+            <a:endParaRPr lang="en-US" sz="1000" dirty="0"/>
+          </a:p>
+        </p:txBody>
+      </p:sp>
+      <p:sp>
+        <p:nvSpPr>
+          <p:cNvPr id="17" name="Shape 15"/>
           <p:cNvSpPr/>
           <p:nvPr/>
         </p:nvSpPr>
         <p:spPr>
           <a:xfrm>
             <a:off x="6035040" y="1051560"/>
-            <a:ext cx="2606040" cy="3520440"/>
+            <a:ext cx="2606040" cy="3310128"/>
           </a:xfrm>
           <a:prstGeom prst="rect">
             <a:avLst/>
@@ -6003,86 +6169,86 @@
       </p:sp>
       <p:sp>
         <p:nvSpPr>
-          <p:cNvPr id="14" name="Text 12"/>
-          <p:cNvSpPr txBox="1"/>
-          <p:nvPr/>
-        </p:nvSpPr>
-        <p:spPr>
-          <a:xfrm>
-            <a:off x="6236208" y="1207008"/>
-            <a:ext cx="2240280" cy="411480"/>
-          </a:xfrm>
-          <a:prstGeom prst="rect">
-            <a:avLst/>
-          </a:prstGeom>
-          <a:noFill/>
-          <a:ln/>
-        </p:spPr>
-        <p:txBody>
-          <a:bodyPr wrap="square" lIns="0" tIns="0" rIns="0" bIns="0" rtlCol="0" anchor="t"/>
-          <a:lstStyle/>
-          <a:p>
-            <a:pPr indent="0" marL="0">
-              <a:buNone/>
-            </a:pPr>
-            <a:r>
-              <a:rPr lang="en-US" sz="2200" b="1" dirty="0">
+          <p:cNvPr id="18" name="Text 16"/>
+          <p:cNvSpPr txBox="1"/>
+          <p:nvPr/>
+        </p:nvSpPr>
+        <p:spPr>
+          <a:xfrm>
+            <a:off x="6236208" y="1188720"/>
+            <a:ext cx="2240280" cy="384048"/>
+          </a:xfrm>
+          <a:prstGeom prst="rect">
+            <a:avLst/>
+          </a:prstGeom>
+          <a:noFill/>
+          <a:ln/>
+        </p:spPr>
+        <p:txBody>
+          <a:bodyPr wrap="square" lIns="0" tIns="0" rIns="0" bIns="0" rtlCol="0" anchor="t"/>
+          <a:lstStyle/>
+          <a:p>
+            <a:pPr indent="0" marL="0">
+              <a:buNone/>
+            </a:pPr>
+            <a:r>
+              <a:rPr lang="en-US" sz="2100" b="1" dirty="0">
                 <a:solidFill>
                   <a:srgbClr val="FFFFFF"/>
                 </a:solidFill>
               </a:rPr>
               <a:t>Elite</a:t>
             </a:r>
-            <a:endParaRPr lang="en-US" sz="2200" dirty="0"/>
-          </a:p>
-        </p:txBody>
-      </p:sp>
-      <p:sp>
-        <p:nvSpPr>
-          <p:cNvPr id="15" name="Text 13"/>
-          <p:cNvSpPr txBox="1"/>
-          <p:nvPr/>
-        </p:nvSpPr>
-        <p:spPr>
-          <a:xfrm>
-            <a:off x="6236208" y="1664208"/>
-            <a:ext cx="2240280" cy="685800"/>
-          </a:xfrm>
-          <a:prstGeom prst="rect">
-            <a:avLst/>
-          </a:prstGeom>
-          <a:noFill/>
-          <a:ln/>
-        </p:spPr>
-        <p:txBody>
-          <a:bodyPr wrap="square" lIns="0" tIns="0" rIns="0" bIns="0" rtlCol="0" anchor="t"/>
-          <a:lstStyle/>
-          <a:p>
-            <a:pPr indent="0" marL="0">
-              <a:buNone/>
-            </a:pPr>
-            <a:r>
-              <a:rPr lang="en-US" sz="1200" i="1" dirty="0">
+            <a:endParaRPr lang="en-US" sz="2100" dirty="0"/>
+          </a:p>
+        </p:txBody>
+      </p:sp>
+      <p:sp>
+        <p:nvSpPr>
+          <p:cNvPr id="19" name="Text 17"/>
+          <p:cNvSpPr txBox="1"/>
+          <p:nvPr/>
+        </p:nvSpPr>
+        <p:spPr>
+          <a:xfrm>
+            <a:off x="6236208" y="1591056"/>
+            <a:ext cx="2240280" cy="566928"/>
+          </a:xfrm>
+          <a:prstGeom prst="rect">
+            <a:avLst/>
+          </a:prstGeom>
+          <a:noFill/>
+          <a:ln/>
+        </p:spPr>
+        <p:txBody>
+          <a:bodyPr wrap="square" lIns="0" tIns="0" rIns="0" bIns="0" rtlCol="0" anchor="t"/>
+          <a:lstStyle/>
+          <a:p>
+            <a:pPr indent="0" marL="0">
+              <a:buNone/>
+            </a:pPr>
+            <a:r>
+              <a:rPr lang="en-US" sz="1100" i="1" dirty="0">
                 <a:solidFill>
                   <a:srgbClr val="C9D8F5"/>
                 </a:solidFill>
               </a:rPr>
-              <a:t>Competitors, bodybuilders, members over 35 starting high-intensity work</a:t>
-            </a:r>
-            <a:endParaRPr lang="en-US" sz="1200" dirty="0"/>
-          </a:p>
-        </p:txBody>
-      </p:sp>
-      <p:sp>
-        <p:nvSpPr>
-          <p:cNvPr id="16" name="Text 14"/>
-          <p:cNvSpPr txBox="1"/>
-          <p:nvPr/>
-        </p:nvSpPr>
-        <p:spPr>
-          <a:xfrm>
-            <a:off x="6236208" y="2377440"/>
-            <a:ext cx="2240280" cy="1600200"/>
+              <a:t>Competitors, bodybuilders, over-35s starting high-intensity work</a:t>
+            </a:r>
+            <a:endParaRPr lang="en-US" sz="1100" dirty="0"/>
+          </a:p>
+        </p:txBody>
+      </p:sp>
+      <p:sp>
+        <p:nvSpPr>
+          <p:cNvPr id="20" name="Text 18"/>
+          <p:cNvSpPr txBox="1"/>
+          <p:nvPr/>
+        </p:nvSpPr>
+        <p:spPr>
+          <a:xfrm>
+            <a:off x="6236208" y="2194560"/>
+            <a:ext cx="2240280" cy="1234440"/>
           </a:xfrm>
           <a:prstGeom prst="rect">
             <a:avLst/>
@@ -6096,110 +6262,229 @@
           <a:p>
             <a:pPr marL="342900" indent="-342900">
               <a:spcAft>
-                <a:spcPts val="400"/>
+                <a:spcPts val="300"/>
               </a:spcAft>
               <a:buSzPct val="100000"/>
               <a:buChar char="•"/>
             </a:pPr>
             <a:r>
-              <a:rPr lang="en-US" sz="1300" dirty="0">
+              <a:rPr lang="en-US" sz="1200" dirty="0">
                 <a:solidFill>
                   <a:srgbClr val="FFFFFF"/>
                 </a:solidFill>
               </a:rPr>
-              <a:t>Everything in Performance</a:t>
-            </a:r>
-            <a:endParaRPr lang="en-US" sz="1300" dirty="0"/>
+              <a:t>All of Performance</a:t>
+            </a:r>
+            <a:endParaRPr lang="en-US" sz="1200" dirty="0"/>
           </a:p>
           <a:p>
             <a:pPr marL="342900" indent="-342900">
               <a:spcAft>
-                <a:spcPts val="400"/>
+                <a:spcPts val="300"/>
               </a:spcAft>
               <a:buSzPct val="100000"/>
               <a:buChar char="•"/>
             </a:pPr>
             <a:r>
-              <a:rPr lang="en-US" sz="1300" dirty="0">
+              <a:rPr lang="en-US" sz="1200" dirty="0">
                 <a:solidFill>
                   <a:srgbClr val="FFFFFF"/>
                 </a:solidFill>
               </a:rPr>
               <a:t>Treadmill stress test</a:t>
             </a:r>
-            <a:endParaRPr lang="en-US" sz="1300" dirty="0"/>
+            <a:endParaRPr lang="en-US" sz="1200" dirty="0"/>
           </a:p>
           <a:p>
             <a:pPr marL="342900" indent="-342900">
               <a:spcAft>
-                <a:spcPts val="400"/>
+                <a:spcPts val="300"/>
               </a:spcAft>
               <a:buSzPct val="100000"/>
               <a:buChar char="•"/>
             </a:pPr>
             <a:r>
-              <a:rPr lang="en-US" sz="1300" dirty="0">
+              <a:rPr lang="en-US" sz="1200" dirty="0">
                 <a:solidFill>
                   <a:srgbClr val="FFFFFF"/>
                 </a:solidFill>
               </a:rPr>
               <a:t>hs-troponin, IGF-1, cortisol</a:t>
             </a:r>
-            <a:endParaRPr lang="en-US" sz="1300" dirty="0"/>
+            <a:endParaRPr lang="en-US" sz="1200" dirty="0"/>
           </a:p>
           <a:p>
             <a:pPr marL="342900" indent="-342900">
               <a:spcAft>
-                <a:spcPts val="400"/>
+                <a:spcPts val="300"/>
               </a:spcAft>
               <a:buSzPct val="100000"/>
               <a:buChar char="•"/>
             </a:pPr>
             <a:r>
-              <a:rPr lang="en-US" sz="1300" dirty="0">
+              <a:rPr lang="en-US" sz="1200" dirty="0">
                 <a:solidFill>
                   <a:srgbClr val="FFFFFF"/>
                 </a:solidFill>
               </a:rPr>
-              <a:t>Up to three ultrasound regions</a:t>
-            </a:r>
-            <a:endParaRPr lang="en-US" sz="1300" dirty="0"/>
-          </a:p>
-        </p:txBody>
-      </p:sp>
-      <p:sp>
-        <p:nvSpPr>
-          <p:cNvPr id="17" name="Text 15"/>
-          <p:cNvSpPr txBox="1"/>
-          <p:nvPr/>
-        </p:nvSpPr>
-        <p:spPr>
-          <a:xfrm>
-            <a:off x="6236208" y="4160520"/>
-            <a:ext cx="2240280" cy="274320"/>
-          </a:xfrm>
-          <a:prstGeom prst="rect">
-            <a:avLst/>
-          </a:prstGeom>
-          <a:noFill/>
-          <a:ln/>
-        </p:spPr>
-        <p:txBody>
-          <a:bodyPr wrap="square" lIns="0" tIns="0" rIns="0" bIns="0" rtlCol="0" anchor="t"/>
-          <a:lstStyle/>
-          <a:p>
-            <a:pPr indent="0" marL="0">
-              <a:buNone/>
-            </a:pPr>
-            <a:r>
-              <a:rPr lang="en-US" sz="1200" b="1" dirty="0">
+              <a:t>Up to 3 ultrasound regions</a:t>
+            </a:r>
+            <a:endParaRPr lang="en-US" sz="1200" dirty="0"/>
+          </a:p>
+        </p:txBody>
+      </p:sp>
+      <p:sp>
+        <p:nvSpPr>
+          <p:cNvPr id="21" name="Text 19"/>
+          <p:cNvSpPr txBox="1"/>
+          <p:nvPr/>
+        </p:nvSpPr>
+        <p:spPr>
+          <a:xfrm>
+            <a:off x="6236208" y="3291840"/>
+            <a:ext cx="2240280" cy="457200"/>
+          </a:xfrm>
+          <a:prstGeom prst="rect">
+            <a:avLst/>
+          </a:prstGeom>
+          <a:noFill/>
+          <a:ln/>
+        </p:spPr>
+        <p:txBody>
+          <a:bodyPr wrap="square" lIns="0" tIns="0" rIns="0" bIns="0" rtlCol="0" anchor="t"/>
+          <a:lstStyle/>
+          <a:p>
+            <a:pPr indent="0" marL="0">
+              <a:buNone/>
+            </a:pPr>
+            <a:r>
+              <a:rPr lang="en-US" sz="2800" b="1" dirty="0">
                 <a:solidFill>
                   <a:srgbClr val="22C55E"/>
                 </a:solidFill>
               </a:rPr>
-              <a:t>Partner price on request</a:t>
-            </a:r>
-            <a:endParaRPr lang="en-US" sz="1200" dirty="0"/>
+              <a:t>₹12,999</a:t>
+            </a:r>
+            <a:endParaRPr lang="en-US" sz="2800" dirty="0"/>
+          </a:p>
+        </p:txBody>
+      </p:sp>
+      <p:sp>
+        <p:nvSpPr>
+          <p:cNvPr id="22" name="Text 20"/>
+          <p:cNvSpPr txBox="1"/>
+          <p:nvPr/>
+        </p:nvSpPr>
+        <p:spPr>
+          <a:xfrm>
+            <a:off x="6236208" y="3767328"/>
+            <a:ext cx="2240280" cy="228600"/>
+          </a:xfrm>
+          <a:prstGeom prst="rect">
+            <a:avLst/>
+          </a:prstGeom>
+          <a:noFill/>
+          <a:ln/>
+        </p:spPr>
+        <p:txBody>
+          <a:bodyPr wrap="square" lIns="0" tIns="0" rIns="0" bIns="0" rtlCol="0" anchor="t"/>
+          <a:lstStyle/>
+          <a:p>
+            <a:pPr indent="0" marL="0">
+              <a:buNone/>
+            </a:pPr>
+            <a:r>
+              <a:rPr lang="en-US" sz="1100" b="1" dirty="0">
+                <a:solidFill>
+                  <a:srgbClr val="FFFFFF"/>
+                </a:solidFill>
+              </a:rPr>
+              <a:t>Gym-partner members ₹11,699</a:t>
+            </a:r>
+            <a:endParaRPr lang="en-US" sz="1100" dirty="0"/>
+          </a:p>
+        </p:txBody>
+      </p:sp>
+      <p:sp>
+        <p:nvSpPr>
+          <p:cNvPr id="23" name="Text 21"/>
+          <p:cNvSpPr txBox="1"/>
+          <p:nvPr/>
+        </p:nvSpPr>
+        <p:spPr>
+          <a:xfrm>
+            <a:off x="6236208" y="4023360"/>
+            <a:ext cx="2240280" cy="228600"/>
+          </a:xfrm>
+          <a:prstGeom prst="rect">
+            <a:avLst/>
+          </a:prstGeom>
+          <a:noFill/>
+          <a:ln/>
+        </p:spPr>
+        <p:txBody>
+          <a:bodyPr wrap="square" lIns="0" tIns="0" rIns="0" bIns="0" rtlCol="0" anchor="t"/>
+          <a:lstStyle/>
+          <a:p>
+            <a:pPr indent="0" marL="0">
+              <a:buNone/>
+            </a:pPr>
+            <a:r>
+              <a:rPr lang="en-US" sz="1000" dirty="0">
+                <a:solidFill>
+                  <a:srgbClr val="C9D8F5"/>
+                </a:solidFill>
+              </a:rPr>
+              <a:t>Tests bought separately </a:t>
+            </a:r>
+            <a:pPr indent="0" marL="0">
+              <a:buNone/>
+            </a:pPr>
+            <a:r>
+              <a:rPr lang="en-US" sz="1000" strike="sngStrike" dirty="0">
+                <a:solidFill>
+                  <a:srgbClr val="C9D8F5"/>
+                </a:solidFill>
+              </a:rPr>
+              <a:t>₹40,700</a:t>
+            </a:r>
+            <a:endParaRPr lang="en-US" sz="1000" dirty="0"/>
+          </a:p>
+        </p:txBody>
+      </p:sp>
+      <p:sp>
+        <p:nvSpPr>
+          <p:cNvPr id="24" name="Text 22"/>
+          <p:cNvSpPr txBox="1"/>
+          <p:nvPr/>
+        </p:nvSpPr>
+        <p:spPr>
+          <a:xfrm>
+            <a:off x="457200" y="4462272"/>
+            <a:ext cx="8229600" cy="201168"/>
+          </a:xfrm>
+          <a:prstGeom prst="rect">
+            <a:avLst/>
+          </a:prstGeom>
+          <a:noFill/>
+          <a:ln/>
+        </p:spPr>
+        <p:txBody>
+          <a:bodyPr wrap="square" lIns="0" tIns="0" rIns="0" bIns="0" rtlCol="0" anchor="t"/>
+          <a:lstStyle/>
+          <a:p>
+            <a:pPr indent="0" marL="0">
+              <a:buNone/>
+            </a:pPr>
+            <a:r>
+              <a:rPr lang="en-US" sz="1000" dirty="0">
+                <a:solidFill>
+                  <a:srgbClr val="475569"/>
+                </a:solidFill>
+              </a:rPr>
+              <a:t>Add-ons: Urine drug screen ₹1,999   |   Extra ultrasound region ₹999</a:t>
+            </a:r>
+            <a:endParaRPr lang="en-US" sz="1000" dirty="0"/>
           </a:p>
         </p:txBody>
       </p:sp>
